--- a/docs/presentaciones/classes/clase-177-effect-size-cohen-d-hedges-g-cliff-delta-pingouin-presentacion.pptx
+++ b/docs/presentaciones/classes/clase-177-effect-size-cohen-d-hedges-g-cliff-delta-pingouin-presentacion.pptx
@@ -3272,7 +3272,7 @@
                 </a:solidFill>
                 <a:latin typeface="Segoe UI"/>
               </a:rPr>
-              <a:t>Parte: 3 — Estadística Inferencial y Causal · Fuente: Cohen (1988) + Lakens (2013) + Vallat (2018) pingouin.  Duración estimada: 75 min.</a:t>
+              <a:t>Parte: 3 — Estadística Inferencial y Causal · Fuente: Cohen (1988) + Lakens (2013) + Vallat (2018) pingouin.  Duración estimada: 75 min. · Nivel: Intermedio-Avanzado</a:t>
             </a:r>
           </a:p>
         </p:txBody>
@@ -3581,7 +3581,7 @@
                 </a:solidFill>
                 <a:latin typeface="Segoe UI"/>
               </a:rPr>
-              <a:t>Parte: 3 — Estadística Inferencial y Causal · Fuente: Cohen (1988) + Lakens (2013) + Vallat (2018) pingouin.  Duración estimada: 75 min.</a:t>
+              <a:t>Parte: 3 — Estadística Inferencial y Causal · Fuente: Cohen (1988) + Lakens (2013) + Vallat (2018) pingouin.  Duración estimada: 75 min. · Nivel: Intermedio-Avanzado</a:t>
             </a:r>
           </a:p>
         </p:txBody>
@@ -4845,7 +4845,7 @@
                 </a:solidFill>
                 <a:latin typeface="Segoe UI"/>
               </a:rPr>
-              <a:t>p-value dice si hay diferencia; effect size dice cuán grande. Con n grande, p&lt;0.001 con d=0.05 es trivial. Requiere: pip install numpy scipy statsmodels pingouin.</a:t>
+              <a:t>&lt;!--SOL175184--&gt; No basta con que la diferencia sea significativa: ¿es grande? Un p-value chico solo dice "probablemente no es cero"; con muestras enormes hasta un efecto ridiculo cruza p&lt;0.05. El tamaño del efecto (Cohen's d, Hedges' g, Cliff's δ) mide cuánto difieren los grupos en unidades interpretables — el verdadero titular del resultado.</a:t>
             </a:r>
           </a:p>
         </p:txBody>
